--- a/assets/powerpoints/module-n2-bonjour/C2-merci-et-bonne-fete.pptx
+++ b/assets/powerpoints/module-n2-bonjour/C2-merci-et-bonne-fete.pptx
@@ -11287,7 +11287,25 @@
                 </a:solidFill>
                 <a:latin typeface="Verdana"/>
               </a:rPr>
-              <a:t>Après « merci », on met &lt;b&gt;pour&lt;/b&gt; devant la chose.</a:t>
+              <a:t>Après « merci », on met </a:t>
+            </a:r>
+            <a:r>
+              <a:rPr sz="3400" b="1" i="0">
+                <a:solidFill>
+                  <a:srgbClr val="17181A"/>
+                </a:solidFill>
+                <a:latin typeface="Verdana"/>
+              </a:rPr>
+              <a:t>pour</a:t>
+            </a:r>
+            <a:r>
+              <a:rPr sz="3400" b="0" i="0">
+                <a:solidFill>
+                  <a:srgbClr val="17181A"/>
+                </a:solidFill>
+                <a:latin typeface="Verdana"/>
+              </a:rPr>
+              <a:t> devant la chose.</a:t>
             </a:r>
           </a:p>
         </p:txBody>
@@ -11372,7 +11390,61 @@
                 </a:solidFill>
                 <a:latin typeface="Verdana"/>
               </a:rPr>
-              <a:t>Merci &lt;b&gt;pour&lt;/b&gt; la soupe. Merci &lt;b&gt;pour&lt;/b&gt; votre aide. Merci &lt;b&gt;pour&lt;/b&gt; la carte. Sans « pour », la phrase n'est pas française — et c'est le petit mot qu'on oublie le plus souvent.</a:t>
+              <a:t>Merci </a:t>
+            </a:r>
+            <a:r>
+              <a:rPr sz="2000" b="1" i="0">
+                <a:solidFill>
+                  <a:srgbClr val="4B4F52"/>
+                </a:solidFill>
+                <a:latin typeface="Verdana"/>
+              </a:rPr>
+              <a:t>pour</a:t>
+            </a:r>
+            <a:r>
+              <a:rPr sz="2000" b="0" i="0">
+                <a:solidFill>
+                  <a:srgbClr val="4B4F52"/>
+                </a:solidFill>
+                <a:latin typeface="Verdana"/>
+              </a:rPr>
+              <a:t> la soupe. Merci </a:t>
+            </a:r>
+            <a:r>
+              <a:rPr sz="2000" b="1" i="0">
+                <a:solidFill>
+                  <a:srgbClr val="4B4F52"/>
+                </a:solidFill>
+                <a:latin typeface="Verdana"/>
+              </a:rPr>
+              <a:t>pour</a:t>
+            </a:r>
+            <a:r>
+              <a:rPr sz="2000" b="0" i="0">
+                <a:solidFill>
+                  <a:srgbClr val="4B4F52"/>
+                </a:solidFill>
+                <a:latin typeface="Verdana"/>
+              </a:rPr>
+              <a:t> votre aide. Merci </a:t>
+            </a:r>
+            <a:r>
+              <a:rPr sz="2000" b="1" i="0">
+                <a:solidFill>
+                  <a:srgbClr val="4B4F52"/>
+                </a:solidFill>
+                <a:latin typeface="Verdana"/>
+              </a:rPr>
+              <a:t>pour</a:t>
+            </a:r>
+            <a:r>
+              <a:rPr sz="2000" b="0" i="0">
+                <a:solidFill>
+                  <a:srgbClr val="4B4F52"/>
+                </a:solidFill>
+                <a:latin typeface="Verdana"/>
+              </a:rPr>
+              <a:t> la carte. Sans « pour », la phrase n'est pas française — et c'est le petit mot qu'on oublie le plus souvent.</a:t>
             </a:r>
           </a:p>
         </p:txBody>
